--- a/exports/pptx/lessons/middle-module-05-dot-addition/day-10-final-assessment.pptx
+++ b/exports/pptx/lessons/middle-module-05-dot-addition/day-10-final-assessment.pptx
@@ -17,9 +17,10 @@
     <p:sldId id="265" r:id="rId11"/>
     <p:sldId id="266" r:id="rId12"/>
     <p:sldId id="267" r:id="rId13"/>
+    <p:sldId id="268" r:id="rId14"/>
   </p:sldIdLst>
   <p:notesMasterIdLst>
-    <p:notesMasterId r:id="rId14"/>
+    <p:notesMasterId r:id="rId15"/>
   </p:notesMasterIdLst>
   <p:sldSz cx="9144000" cy="5143500"/>
   <p:notesSz cx="5143500" cy="9144000"/>
@@ -801,6 +802,94 @@
             <a:fld id="{F7021451-1387-4CA6-816F-3879F97B5CBC}" type="slidenum">
               <a:rPr lang="en-US"/>
               <a:t>12</a:t>
+            </a:fld>
+            <a:endParaRPr lang="en-US"/>
+          </a:p>
+        </p:txBody>
+      </p:sp>
+    </p:spTree>
+    <p:extLst>
+      <p:ext uri="{BB962C8B-B14F-4D97-AF65-F5344CB8AC3E}">
+        <p14:creationId xmlns:p14="http://schemas.microsoft.com/office/powerpoint/2010/main" val="1024086991"/>
+      </p:ext>
+    </p:extLst>
+  </p:cSld>
+  <p:clrMapOvr>
+    <a:masterClrMapping/>
+  </p:clrMapOvr>
+</p:notes>
+</file>
+
+<file path=ppt/notesSlides/notesSlide13.xml><?xml version="1.0" encoding="utf-8"?>
+<p:notes xmlns:a="http://schemas.openxmlformats.org/drawingml/2006/main" xmlns:r="http://schemas.openxmlformats.org/officeDocument/2006/relationships" xmlns:p="http://schemas.openxmlformats.org/presentationml/2006/main">
+  <p:cSld>
+    <p:spTree>
+      <p:nvGrpSpPr>
+        <p:cNvPr id="1" name=""/>
+        <p:cNvGrpSpPr/>
+        <p:nvPr/>
+      </p:nvGrpSpPr>
+      <p:grpSpPr>
+        <a:xfrm>
+          <a:off x="0" y="0"/>
+          <a:ext cx="0" cy="0"/>
+          <a:chOff x="0" y="0"/>
+          <a:chExt cx="0" cy="0"/>
+        </a:xfrm>
+      </p:grpSpPr>
+      <p:sp>
+        <p:nvSpPr>
+          <p:cNvPr id="2" name="Slide Image Placeholder 1"/>
+          <p:cNvSpPr>
+            <a:spLocks noGrp="1" noRot="1" noChangeAspect="1"/>
+          </p:cNvSpPr>
+          <p:nvPr>
+            <p:ph type="sldImg"/>
+          </p:nvPr>
+        </p:nvSpPr>
+        <p:spPr/>
+      </p:sp>
+      <p:sp>
+        <p:nvSpPr>
+          <p:cNvPr id="3" name="Notes Placeholder 2"/>
+          <p:cNvSpPr>
+            <a:spLocks noGrp="1"/>
+          </p:cNvSpPr>
+          <p:nvPr>
+            <p:ph type="body" idx="1"/>
+          </p:nvPr>
+        </p:nvSpPr>
+        <p:spPr/>
+        <p:txBody>
+          <a:bodyPr/>
+          <a:lstStyle/>
+          <a:p>
+            <a:r>
+              <a:rPr lang="en-US" dirty="0"/>
+              <a:t/>
+            </a:r>
+            <a:endParaRPr lang="en-US" dirty="0"/>
+          </a:p>
+        </p:txBody>
+      </p:sp>
+      <p:sp>
+        <p:nvSpPr>
+          <p:cNvPr id="4" name="Slide Number Placeholder 3"/>
+          <p:cNvSpPr>
+            <a:spLocks noGrp="1"/>
+          </p:cNvSpPr>
+          <p:nvPr>
+            <p:ph type="sldNum" sz="quarter" idx="10"/>
+          </p:nvPr>
+        </p:nvSpPr>
+        <p:spPr/>
+        <p:txBody>
+          <a:bodyPr/>
+          <a:lstStyle/>
+          <a:p>
+            <a:fld id="{F7021451-1387-4CA6-816F-3879F97B5CBC}" type="slidenum">
+              <a:rPr lang="en-US"/>
+              <a:t>13</a:t>
             </a:fld>
             <a:endParaRPr lang="en-US"/>
           </a:p>
@@ -2100,102 +2189,6 @@
         </p:nvSpPr>
         <p:spPr>
           <a:xfrm>
-            <a:off x="406301" y="1223963"/>
-            <a:ext cx="8498026" cy="274290"/>
-          </a:xfrm>
-          <a:prstGeom prst="rect">
-            <a:avLst/>
-          </a:prstGeom>
-          <a:noFill/>
-          <a:ln/>
-        </p:spPr>
-        <p:txBody>
-          <a:bodyPr wrap="square" lIns="0" tIns="0" rIns="0" bIns="0" rtlCol="0" anchor="t"/>
-          <a:lstStyle/>
-          <a:p>
-            <a:pPr algn="l" indent="0" marL="0">
-              <a:lnSpc>
-                <a:spcPts val="2160"/>
-              </a:lnSpc>
-              <a:spcBef>
-                <a:spcPts val="600"/>
-              </a:spcBef>
-              <a:spcAft>
-                <a:spcPts val="800"/>
-              </a:spcAft>
-              <a:buNone/>
-            </a:pPr>
-            <a:r>
-              <a:rPr lang="en-US" sz="1800" b="1" dirty="0">
-                <a:solidFill>
-                  <a:srgbClr val="FE4447"/>
-                </a:solidFill>
-                <a:latin typeface="Georgia" pitchFamily="34" charset="0"/>
-                <a:ea typeface="Georgia" pitchFamily="34" charset="-122"/>
-                <a:cs typeface="Georgia" pitchFamily="34" charset="-120"/>
-              </a:rPr>
-              <a:t>Learning objective</a:t>
-            </a:r>
-            <a:endParaRPr lang="en-US" sz="1800" dirty="0"/>
-          </a:p>
-        </p:txBody>
-      </p:sp>
-      <p:sp>
-        <p:nvSpPr>
-          <p:cNvPr id="6" name="Text 4"/>
-          <p:cNvSpPr/>
-          <p:nvPr/>
-        </p:nvSpPr>
-        <p:spPr>
-          <a:xfrm>
-            <a:off x="406301" y="1637854"/>
-            <a:ext cx="8498026" cy="426541"/>
-          </a:xfrm>
-          <a:prstGeom prst="rect">
-            <a:avLst/>
-          </a:prstGeom>
-          <a:noFill/>
-          <a:ln/>
-        </p:spPr>
-        <p:txBody>
-          <a:bodyPr wrap="square" lIns="0" tIns="0" rIns="0" bIns="0" rtlCol="0" anchor="t"/>
-          <a:lstStyle/>
-          <a:p>
-            <a:pPr algn="l" indent="0" marL="0">
-              <a:lnSpc>
-                <a:spcPts val="1680"/>
-              </a:lnSpc>
-              <a:spcBef>
-                <a:spcPts val="300"/>
-              </a:spcBef>
-              <a:spcAft>
-                <a:spcPts val="300"/>
-              </a:spcAft>
-              <a:buNone/>
-            </a:pPr>
-            <a:r>
-              <a:rPr lang="en-US" sz="1200" dirty="0">
-                <a:solidFill>
-                  <a:srgbClr val="1C2833"/>
-                </a:solidFill>
-                <a:latin typeface="Arial" pitchFamily="34" charset="0"/>
-                <a:ea typeface="Arial" pitchFamily="34" charset="-122"/>
-                <a:cs typeface="Arial" pitchFamily="34" charset="-120"/>
-              </a:rPr>
-              <a:t>By the end of this lesson, students will demonstrate mastery of the dot method via a summative quiz and a 3-minute project presentation.</a:t>
-            </a:r>
-            <a:endParaRPr lang="en-US" sz="1200" dirty="0"/>
-          </a:p>
-        </p:txBody>
-      </p:sp>
-      <p:sp>
-        <p:nvSpPr>
-          <p:cNvPr id="7" name="Text 5"/>
-          <p:cNvSpPr/>
-          <p:nvPr/>
-        </p:nvSpPr>
-        <p:spPr>
-          <a:xfrm>
             <a:off x="406301" y="4434929"/>
             <a:ext cx="8498026" cy="213271"/>
           </a:xfrm>
@@ -2340,7 +2333,7 @@
                 <a:ea typeface="Georgia" pitchFamily="34" charset="-122"/>
                 <a:cs typeface="Georgia" pitchFamily="34" charset="-120"/>
               </a:rPr>
-              <a:t>Differentiation</a:t>
+              <a:t>Homework</a:t>
             </a:r>
             <a:endParaRPr lang="en-US" sz="1800" dirty="0"/>
           </a:p>
@@ -2355,7 +2348,7 @@
         <p:spPr>
           <a:xfrm>
             <a:off x="634901" y="883593"/>
-            <a:ext cx="8102798" cy="731341"/>
+            <a:ext cx="8102798" cy="281880"/>
           </a:xfrm>
           <a:prstGeom prst="rect">
             <a:avLst/>
@@ -2378,7 +2371,7 @@
               <a:buChar char="•"/>
             </a:pPr>
             <a:r>
-              <a:rPr lang="en-US" sz="1200" b="1" dirty="0">
+              <a:rPr lang="en-US" sz="1200" dirty="0">
                 <a:solidFill>
                   <a:srgbClr val="1C2833"/>
                 </a:solidFill>
@@ -2386,71 +2379,7 @@
                 <a:ea typeface="Arial" pitchFamily="34" charset="-122"/>
                 <a:cs typeface="Arial" pitchFamily="34" charset="-120"/>
               </a:rPr>
-              <a:t>Tier up:</a:t>
-            </a:r>
-            <a:pPr algn="l" indent="0" marL="0">
-              <a:lnSpc>
-                <a:spcPts val="1620"/>
-              </a:lnSpc>
-              <a:spcAft>
-                <a:spcPts val="300"/>
-              </a:spcAft>
-              <a:buNone/>
-            </a:pPr>
-            <a:r>
-              <a:rPr lang="en-US" sz="1200" dirty="0">
-                <a:solidFill>
-                  <a:srgbClr val="1C2833"/>
-                </a:solidFill>
-                <a:latin typeface="Arial" pitchFamily="34" charset="0"/>
-                <a:ea typeface="Arial" pitchFamily="34" charset="-122"/>
-                <a:cs typeface="Arial" pitchFamily="34" charset="-120"/>
-              </a:rPr>
-              <a:t> Students finishing the quiz early can write a 1-paragraph "what would Module 5 look like for Grade 4?" — input for Primary band.</a:t>
-            </a:r>
-            <a:endParaRPr lang="en-US" sz="1200" dirty="0"/>
-          </a:p>
-          <a:p>
-            <a:pPr algn="l" marL="342900" indent="-342900">
-              <a:lnSpc>
-                <a:spcPts val="1620"/>
-              </a:lnSpc>
-              <a:spcAft>
-                <a:spcPts val="300"/>
-              </a:spcAft>
-              <a:buSzPct val="100000"/>
-              <a:buChar char="•"/>
-            </a:pPr>
-            <a:r>
-              <a:rPr lang="en-US" sz="1200" b="1" dirty="0">
-                <a:solidFill>
-                  <a:srgbClr val="1C2833"/>
-                </a:solidFill>
-                <a:latin typeface="Arial" pitchFamily="34" charset="0"/>
-                <a:ea typeface="Arial" pitchFamily="34" charset="-122"/>
-                <a:cs typeface="Arial" pitchFamily="34" charset="-120"/>
-              </a:rPr>
-              <a:t>Tier down:</a:t>
-            </a:r>
-            <a:pPr algn="l" indent="0" marL="0">
-              <a:lnSpc>
-                <a:spcPts val="1620"/>
-              </a:lnSpc>
-              <a:spcAft>
-                <a:spcPts val="300"/>
-              </a:spcAft>
-              <a:buNone/>
-            </a:pPr>
-            <a:r>
-              <a:rPr lang="en-US" sz="1200" dirty="0">
-                <a:solidFill>
-                  <a:srgbClr val="1C2833"/>
-                </a:solidFill>
-                <a:latin typeface="Arial" pitchFamily="34" charset="0"/>
-                <a:ea typeface="Arial" pitchFamily="34" charset="-122"/>
-                <a:cs typeface="Arial" pitchFamily="34" charset="-120"/>
-              </a:rPr>
-              <a:t> Open-notebook quiz for students with documented learning needs.</a:t>
+              <a:t>None. Module is complete.</a:t>
             </a:r>
             <a:endParaRPr lang="en-US" sz="1200" dirty="0"/>
           </a:p>
@@ -2608,7 +2537,7 @@
                 <a:ea typeface="Georgia" pitchFamily="34" charset="-122"/>
                 <a:cs typeface="Georgia" pitchFamily="34" charset="-120"/>
               </a:rPr>
-              <a:t>Teacher notes</a:t>
+              <a:t>Differentiation</a:t>
             </a:r>
             <a:endParaRPr lang="en-US" sz="1800" dirty="0"/>
           </a:p>
@@ -2622,8 +2551,8 @@
         </p:nvSpPr>
         <p:spPr>
           <a:xfrm>
-            <a:off x="406301" y="870942"/>
-            <a:ext cx="8498026" cy="213271"/>
+            <a:off x="634901" y="883593"/>
+            <a:ext cx="8102798" cy="731341"/>
           </a:xfrm>
           <a:prstGeom prst="rect">
             <a:avLst/>
@@ -2635,20 +2564,18 @@
           <a:bodyPr wrap="square" lIns="0" tIns="0" rIns="0" bIns="0" rtlCol="0" anchor="t"/>
           <a:lstStyle/>
           <a:p>
-            <a:pPr algn="l" indent="0" marL="0">
-              <a:lnSpc>
-                <a:spcPts val="1680"/>
-              </a:lnSpc>
-              <a:spcBef>
-                <a:spcPts val="300"/>
-              </a:spcBef>
-              <a:spcAft>
-                <a:spcPts val="300"/>
-              </a:spcAft>
-              <a:buNone/>
-            </a:pPr>
-            <a:r>
-              <a:rPr lang="en-US" sz="1200" dirty="0">
+            <a:pPr algn="l" marL="342900" indent="-342900">
+              <a:lnSpc>
+                <a:spcPts val="1620"/>
+              </a:lnSpc>
+              <a:spcAft>
+                <a:spcPts val="300"/>
+              </a:spcAft>
+              <a:buSzPct val="100000"/>
+              <a:buChar char="•"/>
+            </a:pPr>
+            <a:r>
+              <a:rPr lang="en-US" sz="1200" b="1" dirty="0">
                 <a:solidFill>
                   <a:srgbClr val="1C2833"/>
                 </a:solidFill>
@@ -2656,7 +2583,71 @@
                 <a:ea typeface="Arial" pitchFamily="34" charset="-122"/>
                 <a:cs typeface="Arial" pitchFamily="34" charset="-120"/>
               </a:rPr>
-              <a:t>– Mark quiz immediately after class while presentations are fresh. – If presentations spill into Day 11, protect that time.</a:t>
+              <a:t>Tier up:</a:t>
+            </a:r>
+            <a:pPr algn="l" indent="0" marL="0">
+              <a:lnSpc>
+                <a:spcPts val="1620"/>
+              </a:lnSpc>
+              <a:spcAft>
+                <a:spcPts val="300"/>
+              </a:spcAft>
+              <a:buNone/>
+            </a:pPr>
+            <a:r>
+              <a:rPr lang="en-US" sz="1200" dirty="0">
+                <a:solidFill>
+                  <a:srgbClr val="1C2833"/>
+                </a:solidFill>
+                <a:latin typeface="Arial" pitchFamily="34" charset="0"/>
+                <a:ea typeface="Arial" pitchFamily="34" charset="-122"/>
+                <a:cs typeface="Arial" pitchFamily="34" charset="-120"/>
+              </a:rPr>
+              <a:t> Students finishing the quiz early can write a 1-paragraph "what would Module 5 look like for Grade 4?" — input for Primary band.</a:t>
+            </a:r>
+            <a:endParaRPr lang="en-US" sz="1200" dirty="0"/>
+          </a:p>
+          <a:p>
+            <a:pPr algn="l" marL="342900" indent="-342900">
+              <a:lnSpc>
+                <a:spcPts val="1620"/>
+              </a:lnSpc>
+              <a:spcAft>
+                <a:spcPts val="300"/>
+              </a:spcAft>
+              <a:buSzPct val="100000"/>
+              <a:buChar char="•"/>
+            </a:pPr>
+            <a:r>
+              <a:rPr lang="en-US" sz="1200" b="1" dirty="0">
+                <a:solidFill>
+                  <a:srgbClr val="1C2833"/>
+                </a:solidFill>
+                <a:latin typeface="Arial" pitchFamily="34" charset="0"/>
+                <a:ea typeface="Arial" pitchFamily="34" charset="-122"/>
+                <a:cs typeface="Arial" pitchFamily="34" charset="-120"/>
+              </a:rPr>
+              <a:t>Tier down:</a:t>
+            </a:r>
+            <a:pPr algn="l" indent="0" marL="0">
+              <a:lnSpc>
+                <a:spcPts val="1620"/>
+              </a:lnSpc>
+              <a:spcAft>
+                <a:spcPts val="300"/>
+              </a:spcAft>
+              <a:buNone/>
+            </a:pPr>
+            <a:r>
+              <a:rPr lang="en-US" sz="1200" dirty="0">
+                <a:solidFill>
+                  <a:srgbClr val="1C2833"/>
+                </a:solidFill>
+                <a:latin typeface="Arial" pitchFamily="34" charset="0"/>
+                <a:ea typeface="Arial" pitchFamily="34" charset="-122"/>
+                <a:cs typeface="Arial" pitchFamily="34" charset="-120"/>
+              </a:rPr>
+              <a:t> Open-notebook quiz for students with documented learning needs.</a:t>
             </a:r>
             <a:endParaRPr lang="en-US" sz="1200" dirty="0"/>
           </a:p>
@@ -2814,7 +2805,7 @@
                 <a:ea typeface="Georgia" pitchFamily="34" charset="-122"/>
                 <a:cs typeface="Georgia" pitchFamily="34" charset="-120"/>
               </a:rPr>
-              <a:t>Citation(s) used in this lesson</a:t>
+              <a:t>Teacher notes</a:t>
             </a:r>
             <a:endParaRPr lang="en-US" sz="1800" dirty="0"/>
           </a:p>
@@ -2828,8 +2819,8 @@
         </p:nvSpPr>
         <p:spPr>
           <a:xfrm>
-            <a:off x="406301" y="870942"/>
-            <a:ext cx="8498026" cy="213271"/>
+            <a:off x="634901" y="883593"/>
+            <a:ext cx="8102798" cy="525661"/>
           </a:xfrm>
           <a:prstGeom prst="rect">
             <a:avLst/>
@@ -2841,17 +2832,15 @@
           <a:bodyPr wrap="square" lIns="0" tIns="0" rIns="0" bIns="0" rtlCol="0" anchor="t"/>
           <a:lstStyle/>
           <a:p>
-            <a:pPr algn="l" indent="0" marL="0">
-              <a:lnSpc>
-                <a:spcPts val="1680"/>
-              </a:lnSpc>
-              <a:spcBef>
-                <a:spcPts val="300"/>
-              </a:spcBef>
-              <a:spcAft>
-                <a:spcPts val="300"/>
-              </a:spcAft>
-              <a:buNone/>
+            <a:pPr algn="l" marL="342900" indent="-342900">
+              <a:lnSpc>
+                <a:spcPts val="1620"/>
+              </a:lnSpc>
+              <a:spcAft>
+                <a:spcPts val="300"/>
+              </a:spcAft>
+              <a:buSzPct val="100000"/>
+              <a:buChar char="•"/>
             </a:pPr>
             <a:r>
               <a:rPr lang="en-US" sz="1200" dirty="0">
@@ -2862,7 +2851,235 @@
                 <a:ea typeface="Arial" pitchFamily="34" charset="-122"/>
                 <a:cs typeface="Arial" pitchFamily="34" charset="-120"/>
               </a:rPr>
-              <a:t>– All sources verified.</a:t>
+              <a:t>Mark quiz immediately after class while presentations are fresh.</a:t>
+            </a:r>
+            <a:endParaRPr lang="en-US" sz="1200" dirty="0"/>
+          </a:p>
+          <a:p>
+            <a:pPr algn="l" marL="342900" indent="-342900">
+              <a:lnSpc>
+                <a:spcPts val="1620"/>
+              </a:lnSpc>
+              <a:spcAft>
+                <a:spcPts val="300"/>
+              </a:spcAft>
+              <a:buSzPct val="100000"/>
+              <a:buChar char="•"/>
+            </a:pPr>
+            <a:r>
+              <a:rPr lang="en-US" sz="1200" dirty="0">
+                <a:solidFill>
+                  <a:srgbClr val="1C2833"/>
+                </a:solidFill>
+                <a:latin typeface="Arial" pitchFamily="34" charset="0"/>
+                <a:ea typeface="Arial" pitchFamily="34" charset="-122"/>
+                <a:cs typeface="Arial" pitchFamily="34" charset="-120"/>
+              </a:rPr>
+              <a:t>If presentations spill into Day 11, protect that time.</a:t>
+            </a:r>
+            <a:endParaRPr lang="en-US" sz="1200" dirty="0"/>
+          </a:p>
+        </p:txBody>
+      </p:sp>
+      <p:sp>
+        <p:nvSpPr>
+          <p:cNvPr id="5" name="Text 3"/>
+          <p:cNvSpPr/>
+          <p:nvPr/>
+        </p:nvSpPr>
+        <p:spPr>
+          <a:xfrm>
+            <a:off x="406301" y="4434929"/>
+            <a:ext cx="8498026" cy="213271"/>
+          </a:xfrm>
+          <a:prstGeom prst="rect">
+            <a:avLst/>
+          </a:prstGeom>
+          <a:noFill/>
+          <a:ln/>
+        </p:spPr>
+        <p:txBody>
+          <a:bodyPr wrap="square" lIns="0" tIns="0" rIns="0" bIns="0" rtlCol="0" anchor="t"/>
+          <a:lstStyle/>
+          <a:p>
+            <a:pPr algn="l" indent="0" marL="0">
+              <a:lnSpc>
+                <a:spcPts val="1680"/>
+              </a:lnSpc>
+              <a:spcBef>
+                <a:spcPts val="300"/>
+              </a:spcBef>
+              <a:spcAft>
+                <a:spcPts val="300"/>
+              </a:spcAft>
+              <a:buNone/>
+            </a:pPr>
+            <a:r>
+              <a:rPr lang="en-US" sz="1200" dirty="0">
+                <a:solidFill>
+                  <a:srgbClr val="1C2833"/>
+                </a:solidFill>
+                <a:latin typeface="Arial" pitchFamily="34" charset="0"/>
+                <a:ea typeface="Arial" pitchFamily="34" charset="-122"/>
+                <a:cs typeface="Arial" pitchFamily="34" charset="-120"/>
+              </a:rPr>
+              <a:t>Middle ·  · IKS Curriculum</a:t>
+            </a:r>
+            <a:endParaRPr lang="en-US" sz="1200" dirty="0"/>
+          </a:p>
+        </p:txBody>
+      </p:sp>
+    </p:spTree>
+  </p:cSld>
+  <p:clrMapOvr>
+    <a:masterClrMapping/>
+  </p:clrMapOvr>
+</p:sld>
+</file>
+
+<file path=ppt/slides/slide13.xml><?xml version="1.0" encoding="utf-8"?>
+<p:sld xmlns:a="http://schemas.openxmlformats.org/drawingml/2006/main" xmlns:r="http://schemas.openxmlformats.org/officeDocument/2006/relationships" xmlns:p="http://schemas.openxmlformats.org/presentationml/2006/main">
+  <p:cSld name="Slide 13">
+    <p:bg>
+      <p:bgPr>
+        <a:solidFill>
+          <a:srgbClr val="FFFFFF"/>
+        </a:solidFill>
+      </p:bgPr>
+    </p:bg>
+    <p:spTree>
+      <p:nvGrpSpPr>
+        <p:cNvPr id="1" name=""/>
+        <p:cNvGrpSpPr/>
+        <p:nvPr/>
+      </p:nvGrpSpPr>
+      <p:grpSpPr>
+        <a:xfrm>
+          <a:off x="0" y="0"/>
+          <a:ext cx="0" cy="0"/>
+          <a:chOff x="0" y="0"/>
+          <a:chExt cx="0" cy="0"/>
+        </a:xfrm>
+      </p:grpSpPr>
+      <p:sp>
+        <p:nvSpPr>
+          <p:cNvPr id="2" name="Text 0"/>
+          <p:cNvSpPr/>
+          <p:nvPr/>
+        </p:nvSpPr>
+        <p:spPr>
+          <a:xfrm>
+            <a:off x="0" y="0"/>
+            <a:ext cx="9144000" cy="101501"/>
+          </a:xfrm>
+          <a:prstGeom prst="rect">
+            <a:avLst/>
+          </a:prstGeom>
+          <a:solidFill>
+            <a:srgbClr val="277884"/>
+          </a:solidFill>
+          <a:ln/>
+        </p:spPr>
+        <p:txBody>
+          <a:bodyPr wrap="square" rtlCol="0" anchor="ctr"/>
+          <a:lstStyle/>
+          <a:p>
+            <a:pPr indent="0" marL="0">
+              <a:buNone/>
+            </a:pPr>
+            <a:endParaRPr lang="en-US" dirty="0"/>
+          </a:p>
+        </p:txBody>
+      </p:sp>
+      <p:sp>
+        <p:nvSpPr>
+          <p:cNvPr id="3" name="Text 1"/>
+          <p:cNvSpPr/>
+          <p:nvPr/>
+        </p:nvSpPr>
+        <p:spPr>
+          <a:xfrm>
+            <a:off x="406301" y="457051"/>
+            <a:ext cx="8498026" cy="274290"/>
+          </a:xfrm>
+          <a:prstGeom prst="rect">
+            <a:avLst/>
+          </a:prstGeom>
+          <a:noFill/>
+          <a:ln/>
+        </p:spPr>
+        <p:txBody>
+          <a:bodyPr wrap="square" lIns="0" tIns="0" rIns="0" bIns="0" rtlCol="0" anchor="t"/>
+          <a:lstStyle/>
+          <a:p>
+            <a:pPr algn="l" indent="0" marL="0">
+              <a:lnSpc>
+                <a:spcPts val="2160"/>
+              </a:lnSpc>
+              <a:spcBef>
+                <a:spcPts val="600"/>
+              </a:spcBef>
+              <a:spcAft>
+                <a:spcPts val="800"/>
+              </a:spcAft>
+              <a:buNone/>
+            </a:pPr>
+            <a:r>
+              <a:rPr lang="en-US" sz="1800" b="1" dirty="0">
+                <a:solidFill>
+                  <a:srgbClr val="FE4447"/>
+                </a:solidFill>
+                <a:latin typeface="Georgia" pitchFamily="34" charset="0"/>
+                <a:ea typeface="Georgia" pitchFamily="34" charset="-122"/>
+                <a:cs typeface="Georgia" pitchFamily="34" charset="-120"/>
+              </a:rPr>
+              <a:t>Citation(s) used in this lesson</a:t>
+            </a:r>
+            <a:endParaRPr lang="en-US" sz="1800" dirty="0"/>
+          </a:p>
+        </p:txBody>
+      </p:sp>
+      <p:sp>
+        <p:nvSpPr>
+          <p:cNvPr id="4" name="Text 2"/>
+          <p:cNvSpPr/>
+          <p:nvPr/>
+        </p:nvSpPr>
+        <p:spPr>
+          <a:xfrm>
+            <a:off x="634901" y="883593"/>
+            <a:ext cx="8102798" cy="281880"/>
+          </a:xfrm>
+          <a:prstGeom prst="rect">
+            <a:avLst/>
+          </a:prstGeom>
+          <a:noFill/>
+          <a:ln/>
+        </p:spPr>
+        <p:txBody>
+          <a:bodyPr wrap="square" lIns="0" tIns="0" rIns="0" bIns="0" rtlCol="0" anchor="t"/>
+          <a:lstStyle/>
+          <a:p>
+            <a:pPr algn="l" marL="342900" indent="-342900">
+              <a:lnSpc>
+                <a:spcPts val="1620"/>
+              </a:lnSpc>
+              <a:spcAft>
+                <a:spcPts val="300"/>
+              </a:spcAft>
+              <a:buSzPct val="100000"/>
+              <a:buChar char="•"/>
+            </a:pPr>
+            <a:r>
+              <a:rPr lang="en-US" sz="1200" dirty="0">
+                <a:solidFill>
+                  <a:srgbClr val="1C2833"/>
+                </a:solidFill>
+                <a:latin typeface="Arial" pitchFamily="34" charset="0"/>
+                <a:ea typeface="Arial" pitchFamily="34" charset="-122"/>
+                <a:cs typeface="Arial" pitchFamily="34" charset="-120"/>
+              </a:rPr>
+              <a:t>All sources verified.</a:t>
             </a:r>
             <a:endParaRPr lang="en-US" sz="1200" dirty="0"/>
           </a:p>
@@ -3020,7 +3237,7 @@
                 <a:ea typeface="Georgia" pitchFamily="34" charset="-122"/>
                 <a:cs typeface="Georgia" pitchFamily="34" charset="-120"/>
               </a:rPr>
-              <a:t>Materials</a:t>
+              <a:t>Learning objective</a:t>
             </a:r>
             <a:endParaRPr lang="en-US" sz="1800" dirty="0"/>
           </a:p>
@@ -3035,7 +3252,7 @@
         <p:spPr>
           <a:xfrm>
             <a:off x="406301" y="870942"/>
-            <a:ext cx="8498026" cy="222796"/>
+            <a:ext cx="8498026" cy="426541"/>
           </a:xfrm>
           <a:prstGeom prst="rect">
             <a:avLst/>
@@ -3068,53 +3285,7 @@
                 <a:ea typeface="Arial" pitchFamily="34" charset="-122"/>
                 <a:cs typeface="Arial" pitchFamily="34" charset="-120"/>
               </a:rPr>
-              <a:t>– Summative quiz (</a:t>
-            </a:r>
-            <a:pPr algn="l" indent="0" marL="0">
-              <a:lnSpc>
-                <a:spcPts val="1680"/>
-              </a:lnSpc>
-              <a:spcBef>
-                <a:spcPts val="300"/>
-              </a:spcBef>
-              <a:spcAft>
-                <a:spcPts val="300"/>
-              </a:spcAft>
-              <a:buNone/>
-            </a:pPr>
-            <a:r>
-              <a:rPr lang="en-US" sz="1200" dirty="0">
-                <a:solidFill>
-                  <a:srgbClr val="1C2833"/>
-                </a:solidFill>
-                <a:latin typeface="Arial" pitchFamily="34" charset="0"/>
-                <a:ea typeface="Arial" pitchFamily="34" charset="-122"/>
-                <a:cs typeface="Arial" pitchFamily="34" charset="-120"/>
-              </a:rPr>
-              <a:t>quizzes/summative.md</a:t>
-            </a:r>
-            <a:pPr algn="l" indent="0" marL="0">
-              <a:lnSpc>
-                <a:spcPts val="1680"/>
-              </a:lnSpc>
-              <a:spcBef>
-                <a:spcPts val="300"/>
-              </a:spcBef>
-              <a:spcAft>
-                <a:spcPts val="300"/>
-              </a:spcAft>
-              <a:buNone/>
-            </a:pPr>
-            <a:r>
-              <a:rPr lang="en-US" sz="1200" dirty="0">
-                <a:solidFill>
-                  <a:srgbClr val="1C2833"/>
-                </a:solidFill>
-                <a:latin typeface="Arial" pitchFamily="34" charset="0"/>
-                <a:ea typeface="Arial" pitchFamily="34" charset="-122"/>
-                <a:cs typeface="Arial" pitchFamily="34" charset="-120"/>
-              </a:rPr>
-              <a:t>). – Stopwatch. – Rubric per pair. – Reflection slip per student.</a:t>
+              <a:t>By the end of this lesson, students will demonstrate mastery of the dot method via a summative quiz and a 3-minute project presentation.</a:t>
             </a:r>
             <a:endParaRPr lang="en-US" sz="1200" dirty="0"/>
           </a:p>
@@ -3272,7 +3443,7 @@
                 <a:ea typeface="Georgia" pitchFamily="34" charset="-122"/>
                 <a:cs typeface="Georgia" pitchFamily="34" charset="-120"/>
               </a:rPr>
-              <a:t>Lesson flow</a:t>
+              <a:t>Materials</a:t>
             </a:r>
             <a:endParaRPr lang="en-US" sz="1800" dirty="0"/>
           </a:p>
@@ -3281,6 +3452,164 @@
       <p:sp>
         <p:nvSpPr>
           <p:cNvPr id="4" name="Text 2"/>
+          <p:cNvSpPr/>
+          <p:nvPr/>
+        </p:nvSpPr>
+        <p:spPr>
+          <a:xfrm>
+            <a:off x="634901" y="883593"/>
+            <a:ext cx="8102798" cy="1032272"/>
+          </a:xfrm>
+          <a:prstGeom prst="rect">
+            <a:avLst/>
+          </a:prstGeom>
+          <a:noFill/>
+          <a:ln/>
+        </p:spPr>
+        <p:txBody>
+          <a:bodyPr wrap="square" lIns="0" tIns="0" rIns="0" bIns="0" rtlCol="0" anchor="t"/>
+          <a:lstStyle/>
+          <a:p>
+            <a:pPr algn="l" marL="342900" indent="-342900">
+              <a:lnSpc>
+                <a:spcPts val="1620"/>
+              </a:lnSpc>
+              <a:spcAft>
+                <a:spcPts val="300"/>
+              </a:spcAft>
+              <a:buSzPct val="100000"/>
+              <a:buChar char="•"/>
+            </a:pPr>
+            <a:r>
+              <a:rPr lang="en-US" sz="1200" dirty="0">
+                <a:solidFill>
+                  <a:srgbClr val="1C2833"/>
+                </a:solidFill>
+                <a:latin typeface="Arial" pitchFamily="34" charset="0"/>
+                <a:ea typeface="Arial" pitchFamily="34" charset="-122"/>
+                <a:cs typeface="Arial" pitchFamily="34" charset="-120"/>
+              </a:rPr>
+              <a:t>Summative quiz (</a:t>
+            </a:r>
+            <a:pPr algn="l" indent="0" marL="0">
+              <a:lnSpc>
+                <a:spcPts val="1620"/>
+              </a:lnSpc>
+              <a:spcAft>
+                <a:spcPts val="300"/>
+              </a:spcAft>
+              <a:buNone/>
+            </a:pPr>
+            <a:r>
+              <a:rPr lang="en-US" sz="1200" dirty="0">
+                <a:solidFill>
+                  <a:srgbClr val="1C2833"/>
+                </a:solidFill>
+                <a:latin typeface="Arial" pitchFamily="34" charset="0"/>
+                <a:ea typeface="Arial" pitchFamily="34" charset="-122"/>
+                <a:cs typeface="Arial" pitchFamily="34" charset="-120"/>
+              </a:rPr>
+              <a:t>quizzes/summative.md</a:t>
+            </a:r>
+            <a:pPr algn="l" indent="0" marL="0">
+              <a:lnSpc>
+                <a:spcPts val="1620"/>
+              </a:lnSpc>
+              <a:spcAft>
+                <a:spcPts val="300"/>
+              </a:spcAft>
+              <a:buNone/>
+            </a:pPr>
+            <a:r>
+              <a:rPr lang="en-US" sz="1200" dirty="0">
+                <a:solidFill>
+                  <a:srgbClr val="1C2833"/>
+                </a:solidFill>
+                <a:latin typeface="Arial" pitchFamily="34" charset="0"/>
+                <a:ea typeface="Arial" pitchFamily="34" charset="-122"/>
+                <a:cs typeface="Arial" pitchFamily="34" charset="-120"/>
+              </a:rPr>
+              <a:t>).</a:t>
+            </a:r>
+            <a:endParaRPr lang="en-US" sz="1200" dirty="0"/>
+          </a:p>
+          <a:p>
+            <a:pPr algn="l" marL="342900" indent="-342900">
+              <a:lnSpc>
+                <a:spcPts val="1620"/>
+              </a:lnSpc>
+              <a:spcAft>
+                <a:spcPts val="300"/>
+              </a:spcAft>
+              <a:buSzPct val="100000"/>
+              <a:buChar char="•"/>
+            </a:pPr>
+            <a:r>
+              <a:rPr lang="en-US" sz="1200" dirty="0">
+                <a:solidFill>
+                  <a:srgbClr val="1C2833"/>
+                </a:solidFill>
+                <a:latin typeface="Arial" pitchFamily="34" charset="0"/>
+                <a:ea typeface="Arial" pitchFamily="34" charset="-122"/>
+                <a:cs typeface="Arial" pitchFamily="34" charset="-120"/>
+              </a:rPr>
+              <a:t>Stopwatch.</a:t>
+            </a:r>
+            <a:endParaRPr lang="en-US" sz="1200" dirty="0"/>
+          </a:p>
+          <a:p>
+            <a:pPr algn="l" marL="342900" indent="-342900">
+              <a:lnSpc>
+                <a:spcPts val="1620"/>
+              </a:lnSpc>
+              <a:spcAft>
+                <a:spcPts val="300"/>
+              </a:spcAft>
+              <a:buSzPct val="100000"/>
+              <a:buChar char="•"/>
+            </a:pPr>
+            <a:r>
+              <a:rPr lang="en-US" sz="1200" dirty="0">
+                <a:solidFill>
+                  <a:srgbClr val="1C2833"/>
+                </a:solidFill>
+                <a:latin typeface="Arial" pitchFamily="34" charset="0"/>
+                <a:ea typeface="Arial" pitchFamily="34" charset="-122"/>
+                <a:cs typeface="Arial" pitchFamily="34" charset="-120"/>
+              </a:rPr>
+              <a:t>Rubric per pair.</a:t>
+            </a:r>
+            <a:endParaRPr lang="en-US" sz="1200" dirty="0"/>
+          </a:p>
+          <a:p>
+            <a:pPr algn="l" marL="342900" indent="-342900">
+              <a:lnSpc>
+                <a:spcPts val="1620"/>
+              </a:lnSpc>
+              <a:spcAft>
+                <a:spcPts val="300"/>
+              </a:spcAft>
+              <a:buSzPct val="100000"/>
+              <a:buChar char="•"/>
+            </a:pPr>
+            <a:r>
+              <a:rPr lang="en-US" sz="1200" dirty="0">
+                <a:solidFill>
+                  <a:srgbClr val="1C2833"/>
+                </a:solidFill>
+                <a:latin typeface="Arial" pitchFamily="34" charset="0"/>
+                <a:ea typeface="Arial" pitchFamily="34" charset="-122"/>
+                <a:cs typeface="Arial" pitchFamily="34" charset="-120"/>
+              </a:rPr>
+              <a:t>Reflection slip per student.</a:t>
+            </a:r>
+            <a:endParaRPr lang="en-US" sz="1200" dirty="0"/>
+          </a:p>
+        </p:txBody>
+      </p:sp>
+      <p:sp>
+        <p:nvSpPr>
+          <p:cNvPr id="5" name="Text 3"/>
           <p:cNvSpPr/>
           <p:nvPr/>
         </p:nvSpPr>
@@ -3430,7 +3759,7 @@
                 <a:ea typeface="Georgia" pitchFamily="34" charset="-122"/>
                 <a:cs typeface="Georgia" pitchFamily="34" charset="-120"/>
               </a:rPr>
-              <a:t>Warm-up (2 min)</a:t>
+              <a:t>Lesson flow</a:t>
             </a:r>
             <a:endParaRPr lang="en-US" sz="1800" dirty="0"/>
           </a:p>
@@ -3439,54 +3768,6 @@
       <p:sp>
         <p:nvSpPr>
           <p:cNvPr id="4" name="Text 2"/>
-          <p:cNvSpPr/>
-          <p:nvPr/>
-        </p:nvSpPr>
-        <p:spPr>
-          <a:xfrm>
-            <a:off x="406301" y="870942"/>
-            <a:ext cx="8498026" cy="213271"/>
-          </a:xfrm>
-          <a:prstGeom prst="rect">
-            <a:avLst/>
-          </a:prstGeom>
-          <a:noFill/>
-          <a:ln/>
-        </p:spPr>
-        <p:txBody>
-          <a:bodyPr wrap="square" lIns="0" tIns="0" rIns="0" bIns="0" rtlCol="0" anchor="t"/>
-          <a:lstStyle/>
-          <a:p>
-            <a:pPr algn="l" indent="0" marL="0">
-              <a:lnSpc>
-                <a:spcPts val="1680"/>
-              </a:lnSpc>
-              <a:spcBef>
-                <a:spcPts val="300"/>
-              </a:spcBef>
-              <a:spcAft>
-                <a:spcPts val="300"/>
-              </a:spcAft>
-              <a:buNone/>
-            </a:pPr>
-            <a:r>
-              <a:rPr lang="en-US" sz="1200" dirty="0">
-                <a:solidFill>
-                  <a:srgbClr val="1C2833"/>
-                </a:solidFill>
-                <a:latin typeface="Arial" pitchFamily="34" charset="0"/>
-                <a:ea typeface="Arial" pitchFamily="34" charset="-122"/>
-                <a:cs typeface="Arial" pitchFamily="34" charset="-120"/>
-              </a:rPr>
-              <a:t>– Brief: "Quiz first (15 min), presentations after."</a:t>
-            </a:r>
-            <a:endParaRPr lang="en-US" sz="1200" dirty="0"/>
-          </a:p>
-        </p:txBody>
-      </p:sp>
-      <p:sp>
-        <p:nvSpPr>
-          <p:cNvPr id="5" name="Text 3"/>
           <p:cNvSpPr/>
           <p:nvPr/>
         </p:nvSpPr>
@@ -3636,7 +3917,7 @@
                 <a:ea typeface="Georgia" pitchFamily="34" charset="-122"/>
                 <a:cs typeface="Georgia" pitchFamily="34" charset="-120"/>
               </a:rPr>
-              <a:t>Part 1: Summative Quiz (15 min)</a:t>
+              <a:t>Warm-up (2 min)</a:t>
             </a:r>
             <a:endParaRPr lang="en-US" sz="1800" dirty="0"/>
           </a:p>
@@ -3650,8 +3931,8 @@
         </p:nvSpPr>
         <p:spPr>
           <a:xfrm>
-            <a:off x="406301" y="870942"/>
-            <a:ext cx="8498026" cy="436066"/>
+            <a:off x="634901" y="883593"/>
+            <a:ext cx="8102798" cy="281880"/>
           </a:xfrm>
           <a:prstGeom prst="rect">
             <a:avLst/>
@@ -3663,17 +3944,15 @@
           <a:bodyPr wrap="square" lIns="0" tIns="0" rIns="0" bIns="0" rtlCol="0" anchor="t"/>
           <a:lstStyle/>
           <a:p>
-            <a:pPr algn="l" indent="0" marL="0">
-              <a:lnSpc>
-                <a:spcPts val="1680"/>
-              </a:lnSpc>
-              <a:spcBef>
-                <a:spcPts val="300"/>
-              </a:spcBef>
-              <a:spcAft>
-                <a:spcPts val="300"/>
-              </a:spcAft>
-              <a:buNone/>
+            <a:pPr algn="l" marL="342900" indent="-342900">
+              <a:lnSpc>
+                <a:spcPts val="1620"/>
+              </a:lnSpc>
+              <a:spcAft>
+                <a:spcPts val="300"/>
+              </a:spcAft>
+              <a:buSzPct val="100000"/>
+              <a:buChar char="•"/>
             </a:pPr>
             <a:r>
               <a:rPr lang="en-US" sz="1200" dirty="0">
@@ -3684,53 +3963,7 @@
                 <a:ea typeface="Arial" pitchFamily="34" charset="-122"/>
                 <a:cs typeface="Arial" pitchFamily="34" charset="-120"/>
               </a:rPr>
-              <a:t>– Distribute </a:t>
-            </a:r>
-            <a:pPr algn="l" indent="0" marL="0">
-              <a:lnSpc>
-                <a:spcPts val="1680"/>
-              </a:lnSpc>
-              <a:spcBef>
-                <a:spcPts val="300"/>
-              </a:spcBef>
-              <a:spcAft>
-                <a:spcPts val="300"/>
-              </a:spcAft>
-              <a:buNone/>
-            </a:pPr>
-            <a:r>
-              <a:rPr lang="en-US" sz="1200" dirty="0">
-                <a:solidFill>
-                  <a:srgbClr val="1C2833"/>
-                </a:solidFill>
-                <a:latin typeface="Arial" pitchFamily="34" charset="0"/>
-                <a:ea typeface="Arial" pitchFamily="34" charset="-122"/>
-                <a:cs typeface="Arial" pitchFamily="34" charset="-120"/>
-              </a:rPr>
-              <a:t>quizzes/summative.md</a:t>
-            </a:r>
-            <a:pPr algn="l" indent="0" marL="0">
-              <a:lnSpc>
-                <a:spcPts val="1680"/>
-              </a:lnSpc>
-              <a:spcBef>
-                <a:spcPts val="300"/>
-              </a:spcBef>
-              <a:spcAft>
-                <a:spcPts val="300"/>
-              </a:spcAft>
-              <a:buNone/>
-            </a:pPr>
-            <a:r>
-              <a:rPr lang="en-US" sz="1200" dirty="0">
-                <a:solidFill>
-                  <a:srgbClr val="1C2833"/>
-                </a:solidFill>
-                <a:latin typeface="Arial" pitchFamily="34" charset="0"/>
-                <a:ea typeface="Arial" pitchFamily="34" charset="-122"/>
-                <a:cs typeface="Arial" pitchFamily="34" charset="-120"/>
-              </a:rPr>
-              <a:t>. Closed notebook. – Quiz covers: make-10 fluency (timed), single column with dots, multi-column with carry, near-base mental addition, one short-answer "why does it work." – Collect at 15-min mark.</a:t>
+              <a:t>Brief: "Quiz first (15 min), presentations after."</a:t>
             </a:r>
             <a:endParaRPr lang="en-US" sz="1200" dirty="0"/>
           </a:p>
@@ -3888,7 +4121,7 @@
                 <a:ea typeface="Georgia" pitchFamily="34" charset="-122"/>
                 <a:cs typeface="Georgia" pitchFamily="34" charset="-120"/>
               </a:rPr>
-              <a:t>Part 2: Project Presentations (25 min)</a:t>
+              <a:t>Part 1: Summative Quiz (15 min)</a:t>
             </a:r>
             <a:endParaRPr lang="en-US" sz="1800" dirty="0"/>
           </a:p>
@@ -3902,8 +4135,8 @@
         </p:nvSpPr>
         <p:spPr>
           <a:xfrm>
-            <a:off x="406301" y="870942"/>
-            <a:ext cx="8498026" cy="213271"/>
+            <a:off x="634901" y="883593"/>
+            <a:ext cx="8102798" cy="994172"/>
           </a:xfrm>
           <a:prstGeom prst="rect">
             <a:avLst/>
@@ -3915,17 +4148,15 @@
           <a:bodyPr wrap="square" lIns="0" tIns="0" rIns="0" bIns="0" rtlCol="0" anchor="t"/>
           <a:lstStyle/>
           <a:p>
-            <a:pPr algn="l" indent="0" marL="0">
-              <a:lnSpc>
-                <a:spcPts val="1680"/>
-              </a:lnSpc>
-              <a:spcBef>
-                <a:spcPts val="300"/>
-              </a:spcBef>
-              <a:spcAft>
-                <a:spcPts val="300"/>
-              </a:spcAft>
-              <a:buNone/>
+            <a:pPr algn="l" marL="342900" indent="-342900">
+              <a:lnSpc>
+                <a:spcPts val="1620"/>
+              </a:lnSpc>
+              <a:spcAft>
+                <a:spcPts val="300"/>
+              </a:spcAft>
+              <a:buSzPct val="100000"/>
+              <a:buChar char="•"/>
             </a:pPr>
             <a:r>
               <a:rPr lang="en-US" sz="1200" dirty="0">
@@ -3936,42 +4167,16 @@
                 <a:ea typeface="Arial" pitchFamily="34" charset="-122"/>
                 <a:cs typeface="Arial" pitchFamily="34" charset="-120"/>
               </a:rPr>
-              <a:t>– 3 min presentation + 1 min Q&amp;A per pair (4 min total).</a:t>
-            </a:r>
-            <a:endParaRPr lang="en-US" sz="1200" dirty="0"/>
-          </a:p>
-        </p:txBody>
-      </p:sp>
-      <p:sp>
-        <p:nvSpPr>
-          <p:cNvPr id="5" name="Text 3"/>
-          <p:cNvSpPr/>
-          <p:nvPr/>
-        </p:nvSpPr>
-        <p:spPr>
-          <a:xfrm>
-            <a:off x="634901" y="1173063"/>
-            <a:ext cx="8102798" cy="281880"/>
-          </a:xfrm>
-          <a:prstGeom prst="rect">
-            <a:avLst/>
-          </a:prstGeom>
-          <a:noFill/>
-          <a:ln/>
-        </p:spPr>
-        <p:txBody>
-          <a:bodyPr wrap="square" lIns="0" tIns="0" rIns="0" bIns="0" rtlCol="0" anchor="t"/>
-          <a:lstStyle/>
-          <a:p>
-            <a:pPr algn="l" marL="342900" indent="-342900">
+              <a:t>Distribute </a:t>
+            </a:r>
+            <a:pPr algn="l" indent="0" marL="0">
               <a:lnSpc>
                 <a:spcPts val="1620"/>
               </a:lnSpc>
               <a:spcAft>
                 <a:spcPts val="300"/>
               </a:spcAft>
-              <a:buSzPct val="100000"/>
-              <a:buChar char="•"/>
+              <a:buNone/>
             </a:pPr>
             <a:r>
               <a:rPr lang="en-US" sz="1200" dirty="0">
@@ -3982,7 +4187,7 @@
                 <a:ea typeface="Arial" pitchFamily="34" charset="-122"/>
                 <a:cs typeface="Arial" pitchFamily="34" charset="-120"/>
               </a:rPr>
-              <a:t>~6 pairs fit in 25 min. </a:t>
+              <a:t>quizzes/summative.md</a:t>
             </a:r>
             <a:pPr algn="l" indent="0" marL="0">
               <a:lnSpc>
@@ -3994,7 +4199,7 @@
               <a:buNone/>
             </a:pPr>
             <a:r>
-              <a:rPr lang="en-US" sz="1200" b="1" dirty="0">
+              <a:rPr lang="en-US" sz="1200" dirty="0">
                 <a:solidFill>
                   <a:srgbClr val="1C2833"/>
                 </a:solidFill>
@@ -4002,16 +4207,20 @@
                 <a:ea typeface="Arial" pitchFamily="34" charset="-122"/>
                 <a:cs typeface="Arial" pitchFamily="34" charset="-120"/>
               </a:rPr>
-              <a:t>Reserve next class for remaining pairs</a:t>
-            </a:r>
-            <a:pPr algn="l" indent="0" marL="0">
+              <a:t>. Closed notebook.</a:t>
+            </a:r>
+            <a:endParaRPr lang="en-US" sz="1200" dirty="0"/>
+          </a:p>
+          <a:p>
+            <a:pPr algn="l" marL="342900" indent="-342900">
               <a:lnSpc>
                 <a:spcPts val="1620"/>
               </a:lnSpc>
               <a:spcAft>
                 <a:spcPts val="300"/>
               </a:spcAft>
-              <a:buNone/>
+              <a:buSzPct val="100000"/>
+              <a:buChar char="•"/>
             </a:pPr>
             <a:r>
               <a:rPr lang="en-US" sz="1200" dirty="0">
@@ -4022,44 +4231,20 @@
                 <a:ea typeface="Arial" pitchFamily="34" charset="-122"/>
                 <a:cs typeface="Arial" pitchFamily="34" charset="-120"/>
               </a:rPr>
-              <a:t> if needed.</a:t>
+              <a:t>Quiz covers: make-10 fluency (timed), single column with dots, multi-column with carry, near-base mental addition, one short-answer "why does it work."</a:t>
             </a:r>
             <a:endParaRPr lang="en-US" sz="1200" dirty="0"/>
           </a:p>
-        </p:txBody>
-      </p:sp>
-      <p:sp>
-        <p:nvSpPr>
-          <p:cNvPr id="6" name="Text 4"/>
-          <p:cNvSpPr/>
-          <p:nvPr/>
-        </p:nvSpPr>
-        <p:spPr>
-          <a:xfrm>
-            <a:off x="406301" y="1543794"/>
-            <a:ext cx="8498026" cy="426541"/>
-          </a:xfrm>
-          <a:prstGeom prst="rect">
-            <a:avLst/>
-          </a:prstGeom>
-          <a:noFill/>
-          <a:ln/>
-        </p:spPr>
-        <p:txBody>
-          <a:bodyPr wrap="square" lIns="0" tIns="0" rIns="0" bIns="0" rtlCol="0" anchor="t"/>
-          <a:lstStyle/>
-          <a:p>
-            <a:pPr algn="l" indent="0" marL="0">
-              <a:lnSpc>
-                <a:spcPts val="1680"/>
-              </a:lnSpc>
-              <a:spcBef>
-                <a:spcPts val="300"/>
-              </a:spcBef>
-              <a:spcAft>
-                <a:spcPts val="300"/>
-              </a:spcAft>
-              <a:buNone/>
+          <a:p>
+            <a:pPr algn="l" marL="342900" indent="-342900">
+              <a:lnSpc>
+                <a:spcPts val="1620"/>
+              </a:lnSpc>
+              <a:spcAft>
+                <a:spcPts val="300"/>
+              </a:spcAft>
+              <a:buSzPct val="100000"/>
+              <a:buChar char="•"/>
             </a:pPr>
             <a:r>
               <a:rPr lang="en-US" sz="1200" dirty="0">
@@ -4070,7 +4255,7 @@
                 <a:ea typeface="Arial" pitchFamily="34" charset="-122"/>
                 <a:cs typeface="Arial" pitchFamily="34" charset="-120"/>
               </a:rPr>
-              <a:t>– During each:   – Teacher marks rubric in real-time.   – One assigned audience member asks one question.   – Other audience members fill "I learned / I wonder" slips.</a:t>
+              <a:t>Collect at 15-min mark.</a:t>
             </a:r>
             <a:endParaRPr lang="en-US" sz="1200" dirty="0"/>
           </a:p>
@@ -4078,7 +4263,7 @@
       </p:sp>
       <p:sp>
         <p:nvSpPr>
-          <p:cNvPr id="7" name="Text 5"/>
+          <p:cNvPr id="5" name="Text 3"/>
           <p:cNvSpPr/>
           <p:nvPr/>
         </p:nvSpPr>
@@ -4228,7 +4413,7 @@
                 <a:ea typeface="Georgia" pitchFamily="34" charset="-122"/>
                 <a:cs typeface="Georgia" pitchFamily="34" charset="-120"/>
               </a:rPr>
-              <a:t>Wrap-up (3 min)</a:t>
+              <a:t>Part 2: Project Presentations (25 min)</a:t>
             </a:r>
             <a:endParaRPr lang="en-US" sz="1800" dirty="0"/>
           </a:p>
@@ -4242,8 +4427,8 @@
         </p:nvSpPr>
         <p:spPr>
           <a:xfrm>
-            <a:off x="406301" y="870942"/>
-            <a:ext cx="8498026" cy="213271"/>
+            <a:off x="634901" y="883593"/>
+            <a:ext cx="8102798" cy="1500783"/>
           </a:xfrm>
           <a:prstGeom prst="rect">
             <a:avLst/>
@@ -4255,17 +4440,15 @@
           <a:bodyPr wrap="square" lIns="0" tIns="0" rIns="0" bIns="0" rtlCol="0" anchor="t"/>
           <a:lstStyle/>
           <a:p>
-            <a:pPr algn="l" indent="0" marL="0">
-              <a:lnSpc>
-                <a:spcPts val="1680"/>
-              </a:lnSpc>
-              <a:spcBef>
-                <a:spcPts val="300"/>
-              </a:spcBef>
-              <a:spcAft>
-                <a:spcPts val="300"/>
-              </a:spcAft>
-              <a:buNone/>
+            <a:pPr algn="l" marL="342900" indent="-342900">
+              <a:lnSpc>
+                <a:spcPts val="1620"/>
+              </a:lnSpc>
+              <a:spcAft>
+                <a:spcPts val="300"/>
+              </a:spcAft>
+              <a:buSzPct val="100000"/>
+              <a:buChar char="•"/>
             </a:pPr>
             <a:r>
               <a:rPr lang="en-US" sz="1200" dirty="0">
@@ -4276,22 +4459,23 @@
                 <a:ea typeface="Arial" pitchFamily="34" charset="-122"/>
                 <a:cs typeface="Arial" pitchFamily="34" charset="-120"/>
               </a:rPr>
-              <a:t>– Closing question (oral): </a:t>
-            </a:r>
-            <a:pPr algn="l" indent="0" marL="0">
-              <a:lnSpc>
-                <a:spcPts val="1680"/>
-              </a:lnSpc>
-              <a:spcBef>
-                <a:spcPts val="300"/>
-              </a:spcBef>
-              <a:spcAft>
-                <a:spcPts val="300"/>
-              </a:spcAft>
-              <a:buNone/>
-            </a:pPr>
-            <a:r>
-              <a:rPr lang="en-US" sz="1200" i="1" dirty="0">
+              <a:t>3 min presentation + 1 min Q&amp;A per pair (4 min total).</a:t>
+            </a:r>
+            <a:endParaRPr lang="en-US" sz="1200" dirty="0"/>
+          </a:p>
+          <a:p>
+            <a:pPr algn="l" marL="342900" indent="-342900">
+              <a:lnSpc>
+                <a:spcPts val="1620"/>
+              </a:lnSpc>
+              <a:spcAft>
+                <a:spcPts val="300"/>
+              </a:spcAft>
+              <a:buSzPct val="100000"/>
+              <a:buChar char="•"/>
+            </a:pPr>
+            <a:r>
+              <a:rPr lang="en-US" sz="1200" dirty="0">
                 <a:solidFill>
                   <a:srgbClr val="1C2833"/>
                 </a:solidFill>
@@ -4299,22 +4483,19 @@
                 <a:ea typeface="Arial" pitchFamily="34" charset="-122"/>
                 <a:cs typeface="Arial" pitchFamily="34" charset="-120"/>
               </a:rPr>
-              <a:t>"What's one mental-math habit you'll keep using after this module?"</a:t>
+              <a:t>~6 pairs fit in 25 min. </a:t>
             </a:r>
             <a:pPr algn="l" indent="0" marL="0">
               <a:lnSpc>
-                <a:spcPts val="1680"/>
-              </a:lnSpc>
-              <a:spcBef>
-                <a:spcPts val="300"/>
-              </a:spcBef>
-              <a:spcAft>
-                <a:spcPts val="300"/>
-              </a:spcAft>
-              <a:buNone/>
-            </a:pPr>
-            <a:r>
-              <a:rPr lang="en-US" sz="1200" dirty="0">
+                <a:spcPts val="1620"/>
+              </a:lnSpc>
+              <a:spcAft>
+                <a:spcPts val="300"/>
+              </a:spcAft>
+              <a:buNone/>
+            </a:pPr>
+            <a:r>
+              <a:rPr lang="en-US" sz="1200" b="1" dirty="0">
                 <a:solidFill>
                   <a:srgbClr val="1C2833"/>
                 </a:solidFill>
@@ -4322,7 +4503,123 @@
                 <a:ea typeface="Arial" pitchFamily="34" charset="-122"/>
                 <a:cs typeface="Arial" pitchFamily="34" charset="-120"/>
               </a:rPr>
-              <a:t> – Reflection slip submitted.</a:t>
+              <a:t>Reserve next class for remaining pairs</a:t>
+            </a:r>
+            <a:pPr algn="l" indent="0" marL="0">
+              <a:lnSpc>
+                <a:spcPts val="1620"/>
+              </a:lnSpc>
+              <a:spcAft>
+                <a:spcPts val="300"/>
+              </a:spcAft>
+              <a:buNone/>
+            </a:pPr>
+            <a:r>
+              <a:rPr lang="en-US" sz="1200" dirty="0">
+                <a:solidFill>
+                  <a:srgbClr val="1C2833"/>
+                </a:solidFill>
+                <a:latin typeface="Arial" pitchFamily="34" charset="0"/>
+                <a:ea typeface="Arial" pitchFamily="34" charset="-122"/>
+                <a:cs typeface="Arial" pitchFamily="34" charset="-120"/>
+              </a:rPr>
+              <a:t> if needed.</a:t>
+            </a:r>
+            <a:endParaRPr lang="en-US" sz="1200" dirty="0"/>
+          </a:p>
+          <a:p>
+            <a:pPr algn="l" marL="342900" indent="-342900">
+              <a:lnSpc>
+                <a:spcPts val="1620"/>
+              </a:lnSpc>
+              <a:spcAft>
+                <a:spcPts val="300"/>
+              </a:spcAft>
+              <a:buSzPct val="100000"/>
+              <a:buChar char="•"/>
+            </a:pPr>
+            <a:r>
+              <a:rPr lang="en-US" sz="1200" dirty="0">
+                <a:solidFill>
+                  <a:srgbClr val="1C2833"/>
+                </a:solidFill>
+                <a:latin typeface="Arial" pitchFamily="34" charset="0"/>
+                <a:ea typeface="Arial" pitchFamily="34" charset="-122"/>
+                <a:cs typeface="Arial" pitchFamily="34" charset="-120"/>
+              </a:rPr>
+              <a:t>During each:</a:t>
+            </a:r>
+            <a:endParaRPr lang="en-US" sz="1200" dirty="0"/>
+          </a:p>
+          <a:p>
+            <a:pPr algn="l" marL="342900" indent="-342900">
+              <a:lnSpc>
+                <a:spcPts val="1620"/>
+              </a:lnSpc>
+              <a:spcAft>
+                <a:spcPts val="300"/>
+              </a:spcAft>
+              <a:buSzPct val="100000"/>
+              <a:buChar char="•"/>
+            </a:pPr>
+            <a:r>
+              <a:rPr lang="en-US" sz="1200" dirty="0">
+                <a:solidFill>
+                  <a:srgbClr val="1C2833"/>
+                </a:solidFill>
+                <a:latin typeface="Arial" pitchFamily="34" charset="0"/>
+                <a:ea typeface="Arial" pitchFamily="34" charset="-122"/>
+                <a:cs typeface="Arial" pitchFamily="34" charset="-120"/>
+              </a:rPr>
+              <a:t>Teacher marks rubric in real-time.</a:t>
+            </a:r>
+            <a:endParaRPr lang="en-US" sz="1200" dirty="0"/>
+          </a:p>
+          <a:p>
+            <a:pPr algn="l" marL="342900" indent="-342900">
+              <a:lnSpc>
+                <a:spcPts val="1620"/>
+              </a:lnSpc>
+              <a:spcAft>
+                <a:spcPts val="300"/>
+              </a:spcAft>
+              <a:buSzPct val="100000"/>
+              <a:buChar char="•"/>
+            </a:pPr>
+            <a:r>
+              <a:rPr lang="en-US" sz="1200" dirty="0">
+                <a:solidFill>
+                  <a:srgbClr val="1C2833"/>
+                </a:solidFill>
+                <a:latin typeface="Arial" pitchFamily="34" charset="0"/>
+                <a:ea typeface="Arial" pitchFamily="34" charset="-122"/>
+                <a:cs typeface="Arial" pitchFamily="34" charset="-120"/>
+              </a:rPr>
+              <a:t>One assigned audience member asks one question.</a:t>
+            </a:r>
+            <a:endParaRPr lang="en-US" sz="1200" dirty="0"/>
+          </a:p>
+          <a:p>
+            <a:pPr algn="l" marL="342900" indent="-342900">
+              <a:lnSpc>
+                <a:spcPts val="1620"/>
+              </a:lnSpc>
+              <a:spcAft>
+                <a:spcPts val="300"/>
+              </a:spcAft>
+              <a:buSzPct val="100000"/>
+              <a:buChar char="•"/>
+            </a:pPr>
+            <a:r>
+              <a:rPr lang="en-US" sz="1200" dirty="0">
+                <a:solidFill>
+                  <a:srgbClr val="1C2833"/>
+                </a:solidFill>
+                <a:latin typeface="Arial" pitchFamily="34" charset="0"/>
+                <a:ea typeface="Arial" pitchFamily="34" charset="-122"/>
+                <a:cs typeface="Arial" pitchFamily="34" charset="-120"/>
+              </a:rPr>
+              <a:t>Other audience members fill "I learned / I wonder" slips.</a:t>
             </a:r>
             <a:endParaRPr lang="en-US" sz="1200" dirty="0"/>
           </a:p>
@@ -4480,7 +4777,7 @@
                 <a:ea typeface="Georgia" pitchFamily="34" charset="-122"/>
                 <a:cs typeface="Georgia" pitchFamily="34" charset="-120"/>
               </a:rPr>
-              <a:t>Student-facing content</a:t>
+              <a:t>Wrap-up (3 min)</a:t>
             </a:r>
             <a:endParaRPr lang="en-US" sz="1800" dirty="0"/>
           </a:p>
@@ -4494,61 +4791,8 @@
         </p:nvSpPr>
         <p:spPr>
           <a:xfrm>
-            <a:off x="406301" y="883593"/>
-            <a:ext cx="8331398" cy="1881187"/>
-          </a:xfrm>
-          <a:prstGeom prst="rect">
-            <a:avLst/>
-          </a:prstGeom>
-          <a:solidFill>
-            <a:srgbClr val="F4F8F9"/>
-          </a:solidFill>
-          <a:ln/>
-        </p:spPr>
-        <p:txBody>
-          <a:bodyPr wrap="square" rtlCol="0" anchor="ctr"/>
-          <a:lstStyle/>
-          <a:p>
-            <a:pPr indent="0" marL="0">
-              <a:buNone/>
-            </a:pPr>
-            <a:endParaRPr lang="en-US" dirty="0"/>
-          </a:p>
-        </p:txBody>
-      </p:sp>
-      <p:sp>
-        <p:nvSpPr>
-          <p:cNvPr id="5" name="Shape 3"/>
-          <p:cNvSpPr/>
-          <p:nvPr/>
-        </p:nvSpPr>
-        <p:spPr>
-          <a:xfrm>
-            <a:off x="434876" y="883593"/>
-            <a:ext cx="0" cy="1881187"/>
-          </a:xfrm>
-          <a:prstGeom prst="line">
-            <a:avLst/>
-          </a:prstGeom>
-          <a:noFill/>
-          <a:ln w="57150">
-            <a:solidFill>
-              <a:srgbClr val="FE4447"/>
-            </a:solidFill>
-            <a:prstDash val="solid"/>
-          </a:ln>
-        </p:spPr>
-      </p:sp>
-      <p:sp>
-        <p:nvSpPr>
-          <p:cNvPr id="6" name="Text 4"/>
-          <p:cNvSpPr/>
-          <p:nvPr/>
-        </p:nvSpPr>
-        <p:spPr>
-          <a:xfrm>
-            <a:off x="692051" y="1074093"/>
-            <a:ext cx="7973389" cy="230981"/>
+            <a:off x="634901" y="883593"/>
+            <a:ext cx="8102798" cy="525661"/>
           </a:xfrm>
           <a:prstGeom prst="rect">
             <a:avLst/>
@@ -4560,203 +4804,78 @@
           <a:bodyPr wrap="square" lIns="0" tIns="0" rIns="0" bIns="0" rtlCol="0" anchor="t"/>
           <a:lstStyle/>
           <a:p>
+            <a:pPr algn="l" marL="342900" indent="-342900">
+              <a:lnSpc>
+                <a:spcPts val="1620"/>
+              </a:lnSpc>
+              <a:spcAft>
+                <a:spcPts val="300"/>
+              </a:spcAft>
+              <a:buSzPct val="100000"/>
+              <a:buChar char="•"/>
+            </a:pPr>
+            <a:r>
+              <a:rPr lang="en-US" sz="1200" dirty="0">
+                <a:solidFill>
+                  <a:srgbClr val="1C2833"/>
+                </a:solidFill>
+                <a:latin typeface="Arial" pitchFamily="34" charset="0"/>
+                <a:ea typeface="Arial" pitchFamily="34" charset="-122"/>
+                <a:cs typeface="Arial" pitchFamily="34" charset="-120"/>
+              </a:rPr>
+              <a:t>Closing question (oral): </a:t>
+            </a:r>
             <a:pPr algn="l" indent="0" marL="0">
               <a:lnSpc>
-                <a:spcPts val="1820"/>
-              </a:lnSpc>
-              <a:spcBef>
-                <a:spcPts val="300"/>
-              </a:spcBef>
-              <a:spcAft>
-                <a:spcPts val="300"/>
-              </a:spcAft>
-              <a:buNone/>
-            </a:pPr>
-            <a:r>
-              <a:rPr lang="en-US" sz="1300" b="1" i="1" dirty="0">
+                <a:spcPts val="1620"/>
+              </a:lnSpc>
+              <a:spcAft>
+                <a:spcPts val="300"/>
+              </a:spcAft>
+              <a:buNone/>
+            </a:pPr>
+            <a:r>
+              <a:rPr lang="en-US" sz="1200" i="1" dirty="0">
                 <a:solidFill>
                   <a:srgbClr val="1C2833"/>
                 </a:solidFill>
-                <a:latin typeface="Georgia" pitchFamily="34" charset="0"/>
-                <a:ea typeface="Georgia" pitchFamily="34" charset="-122"/>
-                <a:cs typeface="Georgia" pitchFamily="34" charset="-120"/>
-              </a:rPr>
-              <a:t>Today: quiz + presentations</a:t>
-            </a:r>
-            <a:endParaRPr lang="en-US" sz="1300" dirty="0"/>
-          </a:p>
-        </p:txBody>
-      </p:sp>
-      <p:sp>
-        <p:nvSpPr>
-          <p:cNvPr id="7" name="Text 5"/>
-          <p:cNvSpPr/>
-          <p:nvPr/>
-        </p:nvSpPr>
-        <p:spPr>
-          <a:xfrm>
-            <a:off x="692051" y="1343174"/>
-            <a:ext cx="7973389" cy="230981"/>
-          </a:xfrm>
-          <a:prstGeom prst="rect">
-            <a:avLst/>
-          </a:prstGeom>
-          <a:noFill/>
-          <a:ln/>
-        </p:spPr>
-        <p:txBody>
-          <a:bodyPr wrap="square" lIns="0" tIns="0" rIns="0" bIns="0" rtlCol="0" anchor="t"/>
-          <a:lstStyle/>
-          <a:p>
-            <a:pPr algn="l" indent="0" marL="0">
-              <a:lnSpc>
-                <a:spcPts val="1820"/>
-              </a:lnSpc>
-              <a:spcBef>
-                <a:spcPts val="300"/>
-              </a:spcBef>
-              <a:spcAft>
-                <a:spcPts val="300"/>
-              </a:spcAft>
-              <a:buNone/>
-            </a:pPr>
-            <a:r>
-              <a:rPr lang="en-US" sz="1300" i="1" dirty="0">
+                <a:latin typeface="Arial" pitchFamily="34" charset="0"/>
+                <a:ea typeface="Arial" pitchFamily="34" charset="-122"/>
+                <a:cs typeface="Arial" pitchFamily="34" charset="-120"/>
+              </a:rPr>
+              <a:t>"What's one mental-math habit you'll keep using after this module?"</a:t>
+            </a:r>
+            <a:endParaRPr lang="en-US" sz="1200" dirty="0"/>
+          </a:p>
+          <a:p>
+            <a:pPr algn="l" marL="342900" indent="-342900">
+              <a:lnSpc>
+                <a:spcPts val="1620"/>
+              </a:lnSpc>
+              <a:spcAft>
+                <a:spcPts val="300"/>
+              </a:spcAft>
+              <a:buSzPct val="100000"/>
+              <a:buChar char="•"/>
+            </a:pPr>
+            <a:r>
+              <a:rPr lang="en-US" sz="1200" dirty="0">
                 <a:solidFill>
                   <a:srgbClr val="1C2833"/>
                 </a:solidFill>
-                <a:latin typeface="Georgia" pitchFamily="34" charset="0"/>
-                <a:ea typeface="Georgia" pitchFamily="34" charset="-122"/>
-                <a:cs typeface="Georgia" pitchFamily="34" charset="-120"/>
-              </a:rPr>
-              <a:t>15 min for the summative quiz (closed book).</a:t>
-            </a:r>
-            <a:endParaRPr lang="en-US" sz="1300" dirty="0"/>
-          </a:p>
-        </p:txBody>
-      </p:sp>
-      <p:sp>
-        <p:nvSpPr>
-          <p:cNvPr id="8" name="Text 6"/>
-          <p:cNvSpPr/>
-          <p:nvPr/>
-        </p:nvSpPr>
-        <p:spPr>
-          <a:xfrm>
-            <a:off x="692051" y="1612255"/>
-            <a:ext cx="7973389" cy="230981"/>
-          </a:xfrm>
-          <a:prstGeom prst="rect">
-            <a:avLst/>
-          </a:prstGeom>
-          <a:noFill/>
-          <a:ln/>
-        </p:spPr>
-        <p:txBody>
-          <a:bodyPr wrap="square" lIns="0" tIns="0" rIns="0" bIns="0" rtlCol="0" anchor="t"/>
-          <a:lstStyle/>
-          <a:p>
-            <a:pPr algn="l" indent="0" marL="0">
-              <a:lnSpc>
-                <a:spcPts val="1820"/>
-              </a:lnSpc>
-              <a:spcBef>
-                <a:spcPts val="300"/>
-              </a:spcBef>
-              <a:spcAft>
-                <a:spcPts val="300"/>
-              </a:spcAft>
-              <a:buNone/>
-            </a:pPr>
-            <a:r>
-              <a:rPr lang="en-US" sz="1300" i="1" dirty="0">
-                <a:solidFill>
-                  <a:srgbClr val="1C2833"/>
-                </a:solidFill>
-                <a:latin typeface="Georgia" pitchFamily="34" charset="0"/>
-                <a:ea typeface="Georgia" pitchFamily="34" charset="-122"/>
-                <a:cs typeface="Georgia" pitchFamily="34" charset="-120"/>
-              </a:rPr>
-              <a:t>3-minute presentation per pair, then 1-min audience question.</a:t>
-            </a:r>
-            <a:endParaRPr lang="en-US" sz="1300" dirty="0"/>
-          </a:p>
-        </p:txBody>
-      </p:sp>
-      <p:sp>
-        <p:nvSpPr>
-          <p:cNvPr id="9" name="Text 7"/>
-          <p:cNvSpPr/>
-          <p:nvPr/>
-        </p:nvSpPr>
-        <p:spPr>
-          <a:xfrm>
-            <a:off x="692051" y="1881336"/>
-            <a:ext cx="7973389" cy="692944"/>
-          </a:xfrm>
-          <a:prstGeom prst="rect">
-            <a:avLst/>
-          </a:prstGeom>
-          <a:noFill/>
-          <a:ln/>
-        </p:spPr>
-        <p:txBody>
-          <a:bodyPr wrap="square" lIns="0" tIns="0" rIns="0" bIns="0" rtlCol="0" anchor="t"/>
-          <a:lstStyle/>
-          <a:p>
-            <a:pPr algn="l" indent="0" marL="0">
-              <a:lnSpc>
-                <a:spcPts val="1820"/>
-              </a:lnSpc>
-              <a:spcBef>
-                <a:spcPts val="300"/>
-              </a:spcBef>
-              <a:spcAft>
-                <a:spcPts val="300"/>
-              </a:spcAft>
-              <a:buNone/>
-            </a:pPr>
-            <a:r>
-              <a:rPr lang="en-US" sz="1300" b="1" i="1" dirty="0">
-                <a:solidFill>
-                  <a:srgbClr val="1C2833"/>
-                </a:solidFill>
-                <a:latin typeface="Georgia" pitchFamily="34" charset="0"/>
-                <a:ea typeface="Georgia" pitchFamily="34" charset="-122"/>
-                <a:cs typeface="Georgia" pitchFamily="34" charset="-120"/>
-              </a:rPr>
-              <a:t>Reflection (due at end of class):</a:t>
-            </a:r>
-            <a:pPr algn="l" indent="0" marL="0">
-              <a:lnSpc>
-                <a:spcPts val="1820"/>
-              </a:lnSpc>
-              <a:spcBef>
-                <a:spcPts val="300"/>
-              </a:spcBef>
-              <a:spcAft>
-                <a:spcPts val="300"/>
-              </a:spcAft>
-              <a:buNone/>
-            </a:pPr>
-            <a:r>
-              <a:rPr lang="en-US" sz="1300" dirty="0">
-                <a:solidFill>
-                  <a:srgbClr val="1C2833"/>
-                </a:solidFill>
-                <a:latin typeface="Georgia" pitchFamily="34" charset="0"/>
-                <a:ea typeface="Georgia" pitchFamily="34" charset="-122"/>
-                <a:cs typeface="Georgia" pitchFamily="34" charset="-120"/>
-              </a:rPr>
-              <a:t> 1. What did you set out to make/learn, and what did you actually end up with? 2. What's the most surprising thing you discovered while making this? 3. If you had three more days, what would you do differently?</a:t>
-            </a:r>
-            <a:endParaRPr lang="en-US" sz="1300" dirty="0"/>
-          </a:p>
-        </p:txBody>
-      </p:sp>
-      <p:sp>
-        <p:nvSpPr>
-          <p:cNvPr id="10" name="Text 8"/>
+                <a:latin typeface="Arial" pitchFamily="34" charset="0"/>
+                <a:ea typeface="Arial" pitchFamily="34" charset="-122"/>
+                <a:cs typeface="Arial" pitchFamily="34" charset="-120"/>
+              </a:rPr>
+              <a:t>Reflection slip submitted.</a:t>
+            </a:r>
+            <a:endParaRPr lang="en-US" sz="1200" dirty="0"/>
+          </a:p>
+        </p:txBody>
+      </p:sp>
+      <p:sp>
+        <p:nvSpPr>
+          <p:cNvPr id="5" name="Text 3"/>
           <p:cNvSpPr/>
           <p:nvPr/>
         </p:nvSpPr>
@@ -4906,7 +5025,7 @@
                 <a:ea typeface="Georgia" pitchFamily="34" charset="-122"/>
                 <a:cs typeface="Georgia" pitchFamily="34" charset="-120"/>
               </a:rPr>
-              <a:t>Homework</a:t>
+              <a:t>Student-facing content</a:t>
             </a:r>
             <a:endParaRPr lang="en-US" sz="1800" dirty="0"/>
           </a:p>
@@ -4920,8 +5039,61 @@
         </p:nvSpPr>
         <p:spPr>
           <a:xfrm>
-            <a:off x="406301" y="870942"/>
-            <a:ext cx="8498026" cy="213271"/>
+            <a:off x="406301" y="883593"/>
+            <a:ext cx="8331398" cy="2226469"/>
+          </a:xfrm>
+          <a:prstGeom prst="rect">
+            <a:avLst/>
+          </a:prstGeom>
+          <a:solidFill>
+            <a:srgbClr val="F4F8F9"/>
+          </a:solidFill>
+          <a:ln/>
+        </p:spPr>
+        <p:txBody>
+          <a:bodyPr wrap="square" rtlCol="0" anchor="ctr"/>
+          <a:lstStyle/>
+          <a:p>
+            <a:pPr indent="0" marL="0">
+              <a:buNone/>
+            </a:pPr>
+            <a:endParaRPr lang="en-US" dirty="0"/>
+          </a:p>
+        </p:txBody>
+      </p:sp>
+      <p:sp>
+        <p:nvSpPr>
+          <p:cNvPr id="5" name="Shape 3"/>
+          <p:cNvSpPr/>
+          <p:nvPr/>
+        </p:nvSpPr>
+        <p:spPr>
+          <a:xfrm>
+            <a:off x="434876" y="883593"/>
+            <a:ext cx="0" cy="2226469"/>
+          </a:xfrm>
+          <a:prstGeom prst="line">
+            <a:avLst/>
+          </a:prstGeom>
+          <a:noFill/>
+          <a:ln w="57150">
+            <a:solidFill>
+              <a:srgbClr val="FE4447"/>
+            </a:solidFill>
+            <a:prstDash val="solid"/>
+          </a:ln>
+        </p:spPr>
+      </p:sp>
+      <p:sp>
+        <p:nvSpPr>
+          <p:cNvPr id="6" name="Text 4"/>
+          <p:cNvSpPr/>
+          <p:nvPr/>
+        </p:nvSpPr>
+        <p:spPr>
+          <a:xfrm>
+            <a:off x="692051" y="1074093"/>
+            <a:ext cx="7973389" cy="230981"/>
           </a:xfrm>
           <a:prstGeom prst="rect">
             <a:avLst/>
@@ -4935,7 +5107,7 @@
           <a:p>
             <a:pPr algn="l" indent="0" marL="0">
               <a:lnSpc>
-                <a:spcPts val="1680"/>
+                <a:spcPts val="1820"/>
               </a:lnSpc>
               <a:spcBef>
                 <a:spcPts val="300"/>
@@ -4946,23 +5118,311 @@
               <a:buNone/>
             </a:pPr>
             <a:r>
-              <a:rPr lang="en-US" sz="1200" dirty="0">
+              <a:rPr lang="en-US" sz="1300" b="1" i="1" dirty="0">
                 <a:solidFill>
                   <a:srgbClr val="1C2833"/>
                 </a:solidFill>
-                <a:latin typeface="Arial" pitchFamily="34" charset="0"/>
-                <a:ea typeface="Arial" pitchFamily="34" charset="-122"/>
-                <a:cs typeface="Arial" pitchFamily="34" charset="-120"/>
-              </a:rPr>
-              <a:t>– None. Module is complete.</a:t>
-            </a:r>
-            <a:endParaRPr lang="en-US" sz="1200" dirty="0"/>
-          </a:p>
-        </p:txBody>
-      </p:sp>
-      <p:sp>
-        <p:nvSpPr>
-          <p:cNvPr id="5" name="Text 3"/>
+                <a:latin typeface="Georgia" pitchFamily="34" charset="0"/>
+                <a:ea typeface="Georgia" pitchFamily="34" charset="-122"/>
+                <a:cs typeface="Georgia" pitchFamily="34" charset="-120"/>
+              </a:rPr>
+              <a:t>Today: quiz + presentations</a:t>
+            </a:r>
+            <a:endParaRPr lang="en-US" sz="1300" dirty="0"/>
+          </a:p>
+        </p:txBody>
+      </p:sp>
+      <p:sp>
+        <p:nvSpPr>
+          <p:cNvPr id="7" name="Text 5"/>
+          <p:cNvSpPr/>
+          <p:nvPr/>
+        </p:nvSpPr>
+        <p:spPr>
+          <a:xfrm>
+            <a:off x="692051" y="1343174"/>
+            <a:ext cx="7973389" cy="230981"/>
+          </a:xfrm>
+          <a:prstGeom prst="rect">
+            <a:avLst/>
+          </a:prstGeom>
+          <a:noFill/>
+          <a:ln/>
+        </p:spPr>
+        <p:txBody>
+          <a:bodyPr wrap="square" lIns="0" tIns="0" rIns="0" bIns="0" rtlCol="0" anchor="t"/>
+          <a:lstStyle/>
+          <a:p>
+            <a:pPr algn="l" indent="0" marL="0">
+              <a:lnSpc>
+                <a:spcPts val="1820"/>
+              </a:lnSpc>
+              <a:spcBef>
+                <a:spcPts val="300"/>
+              </a:spcBef>
+              <a:spcAft>
+                <a:spcPts val="300"/>
+              </a:spcAft>
+              <a:buNone/>
+            </a:pPr>
+            <a:r>
+              <a:rPr lang="en-US" sz="1300" i="1" dirty="0">
+                <a:solidFill>
+                  <a:srgbClr val="1C2833"/>
+                </a:solidFill>
+                <a:latin typeface="Georgia" pitchFamily="34" charset="0"/>
+                <a:ea typeface="Georgia" pitchFamily="34" charset="-122"/>
+                <a:cs typeface="Georgia" pitchFamily="34" charset="-120"/>
+              </a:rPr>
+              <a:t>15 min for the summative quiz (closed book).</a:t>
+            </a:r>
+            <a:endParaRPr lang="en-US" sz="1300" dirty="0"/>
+          </a:p>
+        </p:txBody>
+      </p:sp>
+      <p:sp>
+        <p:nvSpPr>
+          <p:cNvPr id="8" name="Text 6"/>
+          <p:cNvSpPr/>
+          <p:nvPr/>
+        </p:nvSpPr>
+        <p:spPr>
+          <a:xfrm>
+            <a:off x="692051" y="1612255"/>
+            <a:ext cx="7973389" cy="230981"/>
+          </a:xfrm>
+          <a:prstGeom prst="rect">
+            <a:avLst/>
+          </a:prstGeom>
+          <a:noFill/>
+          <a:ln/>
+        </p:spPr>
+        <p:txBody>
+          <a:bodyPr wrap="square" lIns="0" tIns="0" rIns="0" bIns="0" rtlCol="0" anchor="t"/>
+          <a:lstStyle/>
+          <a:p>
+            <a:pPr algn="l" indent="0" marL="0">
+              <a:lnSpc>
+                <a:spcPts val="1820"/>
+              </a:lnSpc>
+              <a:spcBef>
+                <a:spcPts val="300"/>
+              </a:spcBef>
+              <a:spcAft>
+                <a:spcPts val="300"/>
+              </a:spcAft>
+              <a:buNone/>
+            </a:pPr>
+            <a:r>
+              <a:rPr lang="en-US" sz="1300" i="1" dirty="0">
+                <a:solidFill>
+                  <a:srgbClr val="1C2833"/>
+                </a:solidFill>
+                <a:latin typeface="Georgia" pitchFamily="34" charset="0"/>
+                <a:ea typeface="Georgia" pitchFamily="34" charset="-122"/>
+                <a:cs typeface="Georgia" pitchFamily="34" charset="-120"/>
+              </a:rPr>
+              <a:t>3-minute presentation per pair, then 1-min audience question.</a:t>
+            </a:r>
+            <a:endParaRPr lang="en-US" sz="1300" dirty="0"/>
+          </a:p>
+        </p:txBody>
+      </p:sp>
+      <p:sp>
+        <p:nvSpPr>
+          <p:cNvPr id="9" name="Text 7"/>
+          <p:cNvSpPr/>
+          <p:nvPr/>
+        </p:nvSpPr>
+        <p:spPr>
+          <a:xfrm>
+            <a:off x="692051" y="1881336"/>
+            <a:ext cx="7973389" cy="230981"/>
+          </a:xfrm>
+          <a:prstGeom prst="rect">
+            <a:avLst/>
+          </a:prstGeom>
+          <a:noFill/>
+          <a:ln/>
+        </p:spPr>
+        <p:txBody>
+          <a:bodyPr wrap="square" lIns="0" tIns="0" rIns="0" bIns="0" rtlCol="0" anchor="t"/>
+          <a:lstStyle/>
+          <a:p>
+            <a:pPr algn="l" indent="0" marL="0">
+              <a:lnSpc>
+                <a:spcPts val="1820"/>
+              </a:lnSpc>
+              <a:spcBef>
+                <a:spcPts val="300"/>
+              </a:spcBef>
+              <a:spcAft>
+                <a:spcPts val="300"/>
+              </a:spcAft>
+              <a:buNone/>
+            </a:pPr>
+            <a:r>
+              <a:rPr lang="en-US" sz="1300" b="1" i="1" dirty="0">
+                <a:solidFill>
+                  <a:srgbClr val="1C2833"/>
+                </a:solidFill>
+                <a:latin typeface="Georgia" pitchFamily="34" charset="0"/>
+                <a:ea typeface="Georgia" pitchFamily="34" charset="-122"/>
+                <a:cs typeface="Georgia" pitchFamily="34" charset="-120"/>
+              </a:rPr>
+              <a:t>Reflection (due at end of class):</a:t>
+            </a:r>
+            <a:endParaRPr lang="en-US" sz="1300" dirty="0"/>
+          </a:p>
+        </p:txBody>
+      </p:sp>
+      <p:sp>
+        <p:nvSpPr>
+          <p:cNvPr id="10" name="Text 8"/>
+          <p:cNvSpPr/>
+          <p:nvPr/>
+        </p:nvSpPr>
+        <p:spPr>
+          <a:xfrm>
+            <a:off x="692051" y="2150418"/>
+            <a:ext cx="7973389" cy="230981"/>
+          </a:xfrm>
+          <a:prstGeom prst="rect">
+            <a:avLst/>
+          </a:prstGeom>
+          <a:noFill/>
+          <a:ln/>
+        </p:spPr>
+        <p:txBody>
+          <a:bodyPr wrap="square" lIns="0" tIns="0" rIns="0" bIns="0" rtlCol="0" anchor="t"/>
+          <a:lstStyle/>
+          <a:p>
+            <a:pPr algn="l" indent="0" marL="0">
+              <a:lnSpc>
+                <a:spcPts val="1820"/>
+              </a:lnSpc>
+              <a:spcBef>
+                <a:spcPts val="300"/>
+              </a:spcBef>
+              <a:spcAft>
+                <a:spcPts val="300"/>
+              </a:spcAft>
+              <a:buNone/>
+            </a:pPr>
+            <a:r>
+              <a:rPr lang="en-US" sz="1300" i="1" dirty="0">
+                <a:solidFill>
+                  <a:srgbClr val="1C2833"/>
+                </a:solidFill>
+                <a:latin typeface="Georgia" pitchFamily="34" charset="0"/>
+                <a:ea typeface="Georgia" pitchFamily="34" charset="-122"/>
+                <a:cs typeface="Georgia" pitchFamily="34" charset="-120"/>
+              </a:rPr>
+              <a:t>What did you set out to make/learn, and what did you actually end up with?</a:t>
+            </a:r>
+            <a:endParaRPr lang="en-US" sz="1300" dirty="0"/>
+          </a:p>
+        </p:txBody>
+      </p:sp>
+      <p:sp>
+        <p:nvSpPr>
+          <p:cNvPr id="11" name="Text 9"/>
+          <p:cNvSpPr/>
+          <p:nvPr/>
+        </p:nvSpPr>
+        <p:spPr>
+          <a:xfrm>
+            <a:off x="692051" y="2419499"/>
+            <a:ext cx="7973389" cy="230981"/>
+          </a:xfrm>
+          <a:prstGeom prst="rect">
+            <a:avLst/>
+          </a:prstGeom>
+          <a:noFill/>
+          <a:ln/>
+        </p:spPr>
+        <p:txBody>
+          <a:bodyPr wrap="square" lIns="0" tIns="0" rIns="0" bIns="0" rtlCol="0" anchor="t"/>
+          <a:lstStyle/>
+          <a:p>
+            <a:pPr algn="l" indent="0" marL="0">
+              <a:lnSpc>
+                <a:spcPts val="1820"/>
+              </a:lnSpc>
+              <a:spcBef>
+                <a:spcPts val="300"/>
+              </a:spcBef>
+              <a:spcAft>
+                <a:spcPts val="300"/>
+              </a:spcAft>
+              <a:buNone/>
+            </a:pPr>
+            <a:r>
+              <a:rPr lang="en-US" sz="1300" i="1" dirty="0">
+                <a:solidFill>
+                  <a:srgbClr val="1C2833"/>
+                </a:solidFill>
+                <a:latin typeface="Georgia" pitchFamily="34" charset="0"/>
+                <a:ea typeface="Georgia" pitchFamily="34" charset="-122"/>
+                <a:cs typeface="Georgia" pitchFamily="34" charset="-120"/>
+              </a:rPr>
+              <a:t>What's the most surprising thing you discovered while making this?</a:t>
+            </a:r>
+            <a:endParaRPr lang="en-US" sz="1300" dirty="0"/>
+          </a:p>
+        </p:txBody>
+      </p:sp>
+      <p:sp>
+        <p:nvSpPr>
+          <p:cNvPr id="12" name="Text 10"/>
+          <p:cNvSpPr/>
+          <p:nvPr/>
+        </p:nvSpPr>
+        <p:spPr>
+          <a:xfrm>
+            <a:off x="692051" y="2688580"/>
+            <a:ext cx="7973389" cy="230981"/>
+          </a:xfrm>
+          <a:prstGeom prst="rect">
+            <a:avLst/>
+          </a:prstGeom>
+          <a:noFill/>
+          <a:ln/>
+        </p:spPr>
+        <p:txBody>
+          <a:bodyPr wrap="square" lIns="0" tIns="0" rIns="0" bIns="0" rtlCol="0" anchor="t"/>
+          <a:lstStyle/>
+          <a:p>
+            <a:pPr algn="l" indent="0" marL="0">
+              <a:lnSpc>
+                <a:spcPts val="1820"/>
+              </a:lnSpc>
+              <a:spcBef>
+                <a:spcPts val="300"/>
+              </a:spcBef>
+              <a:spcAft>
+                <a:spcPts val="300"/>
+              </a:spcAft>
+              <a:buNone/>
+            </a:pPr>
+            <a:r>
+              <a:rPr lang="en-US" sz="1300" i="1" dirty="0">
+                <a:solidFill>
+                  <a:srgbClr val="1C2833"/>
+                </a:solidFill>
+                <a:latin typeface="Georgia" pitchFamily="34" charset="0"/>
+                <a:ea typeface="Georgia" pitchFamily="34" charset="-122"/>
+                <a:cs typeface="Georgia" pitchFamily="34" charset="-120"/>
+              </a:rPr>
+              <a:t>If you had three more days, what would you do differently?</a:t>
+            </a:r>
+            <a:endParaRPr lang="en-US" sz="1300" dirty="0"/>
+          </a:p>
+        </p:txBody>
+      </p:sp>
+      <p:sp>
+        <p:nvSpPr>
+          <p:cNvPr id="13" name="Text 11"/>
           <p:cNvSpPr/>
           <p:nvPr/>
         </p:nvSpPr>
